--- a/ClassMaterials/ReusableCode/Slides/Part2-Interfaces.pptx
+++ b/ClassMaterials/ReusableCode/Slides/Part2-Interfaces.pptx
@@ -953,7 +953,7 @@
           </a:ln>
           <a:extLst>
             <a:ext uri="{909E8E84-426E-40dd-AFC4-6F175D3DCCD1}">
-              <a14:hiddenFill xmlns:a14="http://schemas.microsoft.com/office/drawing/2010/main" xmlns="">
+              <a14:hiddenFill xmlns="" xmlns:a14="http://schemas.microsoft.com/office/drawing/2010/main">
                 <a:solidFill>
                   <a:srgbClr val="FFFFFF"/>
                 </a:solidFill>
@@ -977,14 +977,14 @@
           <a:ln/>
           <a:extLst>
             <a:ext uri="{909E8E84-426E-40dd-AFC4-6F175D3DCCD1}">
-              <a14:hiddenFill xmlns:a14="http://schemas.microsoft.com/office/drawing/2010/main" xmlns="">
+              <a14:hiddenFill xmlns="" xmlns:a14="http://schemas.microsoft.com/office/drawing/2010/main">
                 <a:solidFill>
                   <a:srgbClr val="FFFFFF"/>
                 </a:solidFill>
               </a14:hiddenFill>
             </a:ext>
             <a:ext uri="{91240B29-F687-4f45-9708-019B960494DF}">
-              <a14:hiddenLine xmlns:a14="http://schemas.microsoft.com/office/drawing/2010/main" xmlns="" w="9525">
+              <a14:hiddenLine xmlns="" xmlns:a14="http://schemas.microsoft.com/office/drawing/2010/main" w="9525">
                 <a:solidFill>
                   <a:srgbClr val="000000"/>
                 </a:solidFill>
@@ -1148,14 +1148,14 @@
           <a:ln/>
           <a:extLst>
             <a:ext uri="{909E8E84-426E-40dd-AFC4-6F175D3DCCD1}">
-              <a14:hiddenFill xmlns:a14="http://schemas.microsoft.com/office/drawing/2010/main" xmlns="">
+              <a14:hiddenFill xmlns="" xmlns:a14="http://schemas.microsoft.com/office/drawing/2010/main">
                 <a:solidFill>
                   <a:srgbClr val="FFFFFF"/>
                 </a:solidFill>
               </a14:hiddenFill>
             </a:ext>
             <a:ext uri="{91240B29-F687-4f45-9708-019B960494DF}">
-              <a14:hiddenLine xmlns:a14="http://schemas.microsoft.com/office/drawing/2010/main" xmlns="" w="9525">
+              <a14:hiddenLine xmlns="" xmlns:a14="http://schemas.microsoft.com/office/drawing/2010/main" w="9525">
                 <a:solidFill>
                   <a:srgbClr val="000000"/>
                 </a:solidFill>
@@ -1342,7 +1342,7 @@
           </a:ln>
           <a:extLst>
             <a:ext uri="{909E8E84-426E-40dd-AFC4-6F175D3DCCD1}">
-              <a14:hiddenFill xmlns:a14="http://schemas.microsoft.com/office/drawing/2010/main" xmlns="">
+              <a14:hiddenFill xmlns="" xmlns:a14="http://schemas.microsoft.com/office/drawing/2010/main">
                 <a:solidFill>
                   <a:srgbClr val="FFFFFF"/>
                 </a:solidFill>
@@ -1366,14 +1366,14 @@
           <a:ln/>
           <a:extLst>
             <a:ext uri="{909E8E84-426E-40dd-AFC4-6F175D3DCCD1}">
-              <a14:hiddenFill xmlns:a14="http://schemas.microsoft.com/office/drawing/2010/main" xmlns="">
+              <a14:hiddenFill xmlns="" xmlns:a14="http://schemas.microsoft.com/office/drawing/2010/main">
                 <a:solidFill>
                   <a:srgbClr val="FFFFFF"/>
                 </a:solidFill>
               </a14:hiddenFill>
             </a:ext>
             <a:ext uri="{91240B29-F687-4f45-9708-019B960494DF}">
-              <a14:hiddenLine xmlns:a14="http://schemas.microsoft.com/office/drawing/2010/main" xmlns="" w="9525">
+              <a14:hiddenLine xmlns="" xmlns:a14="http://schemas.microsoft.com/office/drawing/2010/main" w="9525">
                 <a:solidFill>
                   <a:srgbClr val="000000"/>
                 </a:solidFill>
@@ -1432,14 +1432,14 @@
           <a:ln/>
           <a:extLst>
             <a:ext uri="{909E8E84-426E-40dd-AFC4-6F175D3DCCD1}">
-              <a14:hiddenFill xmlns:a14="http://schemas.microsoft.com/office/drawing/2010/main" xmlns="">
+              <a14:hiddenFill xmlns="" xmlns:a14="http://schemas.microsoft.com/office/drawing/2010/main">
                 <a:solidFill>
                   <a:srgbClr val="FFFFFF"/>
                 </a:solidFill>
               </a14:hiddenFill>
             </a:ext>
             <a:ext uri="{91240B29-F687-4f45-9708-019B960494DF}">
-              <a14:hiddenLine xmlns:a14="http://schemas.microsoft.com/office/drawing/2010/main" xmlns="" w="9525">
+              <a14:hiddenLine xmlns="" xmlns:a14="http://schemas.microsoft.com/office/drawing/2010/main" w="9525">
                 <a:solidFill>
                   <a:srgbClr val="000000"/>
                 </a:solidFill>
@@ -1865,7 +1865,7 @@
           </a:ln>
           <a:extLst>
             <a:ext uri="{909E8E84-426E-40dd-AFC4-6F175D3DCCD1}">
-              <a14:hiddenFill xmlns:a14="http://schemas.microsoft.com/office/drawing/2010/main" xmlns="">
+              <a14:hiddenFill xmlns="" xmlns:a14="http://schemas.microsoft.com/office/drawing/2010/main">
                 <a:solidFill>
                   <a:srgbClr val="FFFFFF"/>
                 </a:solidFill>
@@ -1889,14 +1889,14 @@
           <a:ln/>
           <a:extLst>
             <a:ext uri="{909E8E84-426E-40dd-AFC4-6F175D3DCCD1}">
-              <a14:hiddenFill xmlns:a14="http://schemas.microsoft.com/office/drawing/2010/main" xmlns="">
+              <a14:hiddenFill xmlns="" xmlns:a14="http://schemas.microsoft.com/office/drawing/2010/main">
                 <a:solidFill>
                   <a:srgbClr val="FFFFFF"/>
                 </a:solidFill>
               </a14:hiddenFill>
             </a:ext>
             <a:ext uri="{91240B29-F687-4f45-9708-019B960494DF}">
-              <a14:hiddenLine xmlns:a14="http://schemas.microsoft.com/office/drawing/2010/main" xmlns="" w="9525">
+              <a14:hiddenLine xmlns="" xmlns:a14="http://schemas.microsoft.com/office/drawing/2010/main" w="9525">
                 <a:solidFill>
                   <a:srgbClr val="000000"/>
                 </a:solidFill>
@@ -1933,14 +1933,14 @@
           <a:ln/>
           <a:extLst>
             <a:ext uri="{909E8E84-426E-40dd-AFC4-6F175D3DCCD1}">
-              <a14:hiddenFill xmlns:a14="http://schemas.microsoft.com/office/drawing/2010/main" xmlns="">
+              <a14:hiddenFill xmlns="" xmlns:a14="http://schemas.microsoft.com/office/drawing/2010/main">
                 <a:solidFill>
                   <a:srgbClr val="FFFFFF"/>
                 </a:solidFill>
               </a14:hiddenFill>
             </a:ext>
             <a:ext uri="{91240B29-F687-4f45-9708-019B960494DF}">
-              <a14:hiddenLine xmlns:a14="http://schemas.microsoft.com/office/drawing/2010/main" xmlns="" w="9525">
+              <a14:hiddenLine xmlns="" xmlns:a14="http://schemas.microsoft.com/office/drawing/2010/main" w="9525">
                 <a:solidFill>
                   <a:srgbClr val="000000"/>
                 </a:solidFill>
@@ -2430,7 +2430,7 @@
           </a:ln>
           <a:extLst>
             <a:ext uri="{909E8E84-426E-40dd-AFC4-6F175D3DCCD1}">
-              <a14:hiddenFill xmlns="" xmlns:a14="http://schemas.microsoft.com/office/drawing/2010/main">
+              <a14:hiddenFill xmlns:a14="http://schemas.microsoft.com/office/drawing/2010/main" xmlns="">
                 <a:solidFill>
                   <a:srgbClr val="FFFFFF"/>
                 </a:solidFill>
@@ -2454,14 +2454,14 @@
           <a:ln/>
           <a:extLst>
             <a:ext uri="{909E8E84-426E-40dd-AFC4-6F175D3DCCD1}">
-              <a14:hiddenFill xmlns="" xmlns:a14="http://schemas.microsoft.com/office/drawing/2010/main">
+              <a14:hiddenFill xmlns:a14="http://schemas.microsoft.com/office/drawing/2010/main" xmlns="">
                 <a:solidFill>
                   <a:srgbClr val="FFFFFF"/>
                 </a:solidFill>
               </a14:hiddenFill>
             </a:ext>
             <a:ext uri="{91240B29-F687-4f45-9708-019B960494DF}">
-              <a14:hiddenLine xmlns="" xmlns:a14="http://schemas.microsoft.com/office/drawing/2010/main" w="9525">
+              <a14:hiddenLine xmlns:a14="http://schemas.microsoft.com/office/drawing/2010/main" xmlns="" w="9525">
                 <a:solidFill>
                   <a:srgbClr val="000000"/>
                 </a:solidFill>
@@ -2514,14 +2514,14 @@
           <a:ln/>
           <a:extLst>
             <a:ext uri="{909E8E84-426E-40dd-AFC4-6F175D3DCCD1}">
-              <a14:hiddenFill xmlns="" xmlns:a14="http://schemas.microsoft.com/office/drawing/2010/main">
+              <a14:hiddenFill xmlns:a14="http://schemas.microsoft.com/office/drawing/2010/main" xmlns="">
                 <a:solidFill>
                   <a:srgbClr val="FFFFFF"/>
                 </a:solidFill>
               </a14:hiddenFill>
             </a:ext>
             <a:ext uri="{91240B29-F687-4f45-9708-019B960494DF}">
-              <a14:hiddenLine xmlns="" xmlns:a14="http://schemas.microsoft.com/office/drawing/2010/main" w="9525">
+              <a14:hiddenLine xmlns:a14="http://schemas.microsoft.com/office/drawing/2010/main" xmlns="" w="9525">
                 <a:solidFill>
                   <a:srgbClr val="000000"/>
                 </a:solidFill>
@@ -2815,7 +2815,7 @@
           </a:ln>
           <a:extLst>
             <a:ext uri="{909E8E84-426E-40dd-AFC4-6F175D3DCCD1}">
-              <a14:hiddenFill xmlns:a14="http://schemas.microsoft.com/office/drawing/2010/main" xmlns="">
+              <a14:hiddenFill xmlns="" xmlns:a14="http://schemas.microsoft.com/office/drawing/2010/main">
                 <a:solidFill>
                   <a:srgbClr val="FFFFFF"/>
                 </a:solidFill>
@@ -2839,14 +2839,14 @@
           <a:ln/>
           <a:extLst>
             <a:ext uri="{909E8E84-426E-40dd-AFC4-6F175D3DCCD1}">
-              <a14:hiddenFill xmlns:a14="http://schemas.microsoft.com/office/drawing/2010/main" xmlns="">
+              <a14:hiddenFill xmlns="" xmlns:a14="http://schemas.microsoft.com/office/drawing/2010/main">
                 <a:solidFill>
                   <a:srgbClr val="FFFFFF"/>
                 </a:solidFill>
               </a14:hiddenFill>
             </a:ext>
             <a:ext uri="{91240B29-F687-4f45-9708-019B960494DF}">
-              <a14:hiddenLine xmlns:a14="http://schemas.microsoft.com/office/drawing/2010/main" xmlns="" w="9525">
+              <a14:hiddenLine xmlns="" xmlns:a14="http://schemas.microsoft.com/office/drawing/2010/main" w="9525">
                 <a:solidFill>
                   <a:srgbClr val="000000"/>
                 </a:solidFill>
@@ -2906,14 +2906,14 @@
           <a:ln/>
           <a:extLst>
             <a:ext uri="{909E8E84-426E-40dd-AFC4-6F175D3DCCD1}">
-              <a14:hiddenFill xmlns:a14="http://schemas.microsoft.com/office/drawing/2010/main" xmlns="">
+              <a14:hiddenFill xmlns="" xmlns:a14="http://schemas.microsoft.com/office/drawing/2010/main">
                 <a:solidFill>
                   <a:srgbClr val="FFFFFF"/>
                 </a:solidFill>
               </a14:hiddenFill>
             </a:ext>
             <a:ext uri="{91240B29-F687-4f45-9708-019B960494DF}">
-              <a14:hiddenLine xmlns:a14="http://schemas.microsoft.com/office/drawing/2010/main" xmlns="" w="9525">
+              <a14:hiddenLine xmlns="" xmlns:a14="http://schemas.microsoft.com/office/drawing/2010/main" w="9525">
                 <a:solidFill>
                   <a:srgbClr val="000000"/>
                 </a:solidFill>
@@ -3100,7 +3100,7 @@
           </a:ln>
           <a:extLst>
             <a:ext uri="{909E8E84-426E-40dd-AFC4-6F175D3DCCD1}">
-              <a14:hiddenFill xmlns:a14="http://schemas.microsoft.com/office/drawing/2010/main" xmlns="">
+              <a14:hiddenFill xmlns="" xmlns:a14="http://schemas.microsoft.com/office/drawing/2010/main">
                 <a:solidFill>
                   <a:srgbClr val="FFFFFF"/>
                 </a:solidFill>
@@ -3124,14 +3124,14 @@
           <a:ln/>
           <a:extLst>
             <a:ext uri="{909E8E84-426E-40dd-AFC4-6F175D3DCCD1}">
-              <a14:hiddenFill xmlns:a14="http://schemas.microsoft.com/office/drawing/2010/main" xmlns="">
+              <a14:hiddenFill xmlns="" xmlns:a14="http://schemas.microsoft.com/office/drawing/2010/main">
                 <a:solidFill>
                   <a:srgbClr val="FFFFFF"/>
                 </a:solidFill>
               </a14:hiddenFill>
             </a:ext>
             <a:ext uri="{91240B29-F687-4f45-9708-019B960494DF}">
-              <a14:hiddenLine xmlns:a14="http://schemas.microsoft.com/office/drawing/2010/main" xmlns="" w="9525">
+              <a14:hiddenLine xmlns="" xmlns:a14="http://schemas.microsoft.com/office/drawing/2010/main" w="9525">
                 <a:solidFill>
                   <a:srgbClr val="000000"/>
                 </a:solidFill>
@@ -3247,14 +3247,14 @@
           <a:ln/>
           <a:extLst>
             <a:ext uri="{909E8E84-426E-40dd-AFC4-6F175D3DCCD1}">
-              <a14:hiddenFill xmlns:a14="http://schemas.microsoft.com/office/drawing/2010/main" xmlns="">
+              <a14:hiddenFill xmlns="" xmlns:a14="http://schemas.microsoft.com/office/drawing/2010/main">
                 <a:solidFill>
                   <a:srgbClr val="FFFFFF"/>
                 </a:solidFill>
               </a14:hiddenFill>
             </a:ext>
             <a:ext uri="{91240B29-F687-4f45-9708-019B960494DF}">
-              <a14:hiddenLine xmlns:a14="http://schemas.microsoft.com/office/drawing/2010/main" xmlns="" w="9525">
+              <a14:hiddenLine xmlns="" xmlns:a14="http://schemas.microsoft.com/office/drawing/2010/main" w="9525">
                 <a:solidFill>
                   <a:srgbClr val="000000"/>
                 </a:solidFill>
@@ -3441,7 +3441,7 @@
           </a:ln>
           <a:extLst>
             <a:ext uri="{909E8E84-426E-40dd-AFC4-6F175D3DCCD1}">
-              <a14:hiddenFill xmlns="" xmlns:a14="http://schemas.microsoft.com/office/drawing/2010/main">
+              <a14:hiddenFill xmlns:a14="http://schemas.microsoft.com/office/drawing/2010/main" xmlns="">
                 <a:solidFill>
                   <a:srgbClr val="FFFFFF"/>
                 </a:solidFill>
@@ -3465,14 +3465,14 @@
           <a:ln/>
           <a:extLst>
             <a:ext uri="{909E8E84-426E-40dd-AFC4-6F175D3DCCD1}">
-              <a14:hiddenFill xmlns="" xmlns:a14="http://schemas.microsoft.com/office/drawing/2010/main">
+              <a14:hiddenFill xmlns:a14="http://schemas.microsoft.com/office/drawing/2010/main" xmlns="">
                 <a:solidFill>
                   <a:srgbClr val="FFFFFF"/>
                 </a:solidFill>
               </a14:hiddenFill>
             </a:ext>
             <a:ext uri="{91240B29-F687-4f45-9708-019B960494DF}">
-              <a14:hiddenLine xmlns="" xmlns:a14="http://schemas.microsoft.com/office/drawing/2010/main" w="9525">
+              <a14:hiddenLine xmlns:a14="http://schemas.microsoft.com/office/drawing/2010/main" xmlns="" w="9525">
                 <a:solidFill>
                   <a:srgbClr val="000000"/>
                 </a:solidFill>
@@ -3588,14 +3588,14 @@
           <a:ln/>
           <a:extLst>
             <a:ext uri="{909E8E84-426E-40dd-AFC4-6F175D3DCCD1}">
-              <a14:hiddenFill xmlns="" xmlns:a14="http://schemas.microsoft.com/office/drawing/2010/main">
+              <a14:hiddenFill xmlns:a14="http://schemas.microsoft.com/office/drawing/2010/main" xmlns="">
                 <a:solidFill>
                   <a:srgbClr val="FFFFFF"/>
                 </a:solidFill>
               </a14:hiddenFill>
             </a:ext>
             <a:ext uri="{91240B29-F687-4f45-9708-019B960494DF}">
-              <a14:hiddenLine xmlns="" xmlns:a14="http://schemas.microsoft.com/office/drawing/2010/main" w="9525">
+              <a14:hiddenLine xmlns:a14="http://schemas.microsoft.com/office/drawing/2010/main" xmlns="" w="9525">
                 <a:solidFill>
                   <a:srgbClr val="000000"/>
                 </a:solidFill>
@@ -3782,7 +3782,7 @@
           </a:ln>
           <a:extLst>
             <a:ext uri="{909E8E84-426E-40dd-AFC4-6F175D3DCCD1}">
-              <a14:hiddenFill xmlns:a14="http://schemas.microsoft.com/office/drawing/2010/main" xmlns="">
+              <a14:hiddenFill xmlns="" xmlns:a14="http://schemas.microsoft.com/office/drawing/2010/main">
                 <a:solidFill>
                   <a:srgbClr val="FFFFFF"/>
                 </a:solidFill>
@@ -3806,14 +3806,14 @@
           <a:ln/>
           <a:extLst>
             <a:ext uri="{909E8E84-426E-40dd-AFC4-6F175D3DCCD1}">
-              <a14:hiddenFill xmlns:a14="http://schemas.microsoft.com/office/drawing/2010/main" xmlns="">
+              <a14:hiddenFill xmlns="" xmlns:a14="http://schemas.microsoft.com/office/drawing/2010/main">
                 <a:solidFill>
                   <a:srgbClr val="FFFFFF"/>
                 </a:solidFill>
               </a14:hiddenFill>
             </a:ext>
             <a:ext uri="{91240B29-F687-4f45-9708-019B960494DF}">
-              <a14:hiddenLine xmlns:a14="http://schemas.microsoft.com/office/drawing/2010/main" xmlns="" w="9525">
+              <a14:hiddenLine xmlns="" xmlns:a14="http://schemas.microsoft.com/office/drawing/2010/main" w="9525">
                 <a:solidFill>
                   <a:srgbClr val="000000"/>
                 </a:solidFill>
@@ -3929,14 +3929,14 @@
           <a:ln/>
           <a:extLst>
             <a:ext uri="{909E8E84-426E-40dd-AFC4-6F175D3DCCD1}">
-              <a14:hiddenFill xmlns:a14="http://schemas.microsoft.com/office/drawing/2010/main" xmlns="">
+              <a14:hiddenFill xmlns="" xmlns:a14="http://schemas.microsoft.com/office/drawing/2010/main">
                 <a:solidFill>
                   <a:srgbClr val="FFFFFF"/>
                 </a:solidFill>
               </a14:hiddenFill>
             </a:ext>
             <a:ext uri="{91240B29-F687-4f45-9708-019B960494DF}">
-              <a14:hiddenLine xmlns:a14="http://schemas.microsoft.com/office/drawing/2010/main" xmlns="" w="9525">
+              <a14:hiddenLine xmlns="" xmlns:a14="http://schemas.microsoft.com/office/drawing/2010/main" w="9525">
                 <a:solidFill>
                   <a:srgbClr val="000000"/>
                 </a:solidFill>
@@ -4123,7 +4123,7 @@
           </a:ln>
           <a:extLst>
             <a:ext uri="{909E8E84-426E-40dd-AFC4-6F175D3DCCD1}">
-              <a14:hiddenFill xmlns="" xmlns:a14="http://schemas.microsoft.com/office/drawing/2010/main">
+              <a14:hiddenFill xmlns:a14="http://schemas.microsoft.com/office/drawing/2010/main" xmlns="">
                 <a:solidFill>
                   <a:srgbClr val="FFFFFF"/>
                 </a:solidFill>
@@ -4147,14 +4147,14 @@
           <a:ln/>
           <a:extLst>
             <a:ext uri="{909E8E84-426E-40dd-AFC4-6F175D3DCCD1}">
-              <a14:hiddenFill xmlns="" xmlns:a14="http://schemas.microsoft.com/office/drawing/2010/main">
+              <a14:hiddenFill xmlns:a14="http://schemas.microsoft.com/office/drawing/2010/main" xmlns="">
                 <a:solidFill>
                   <a:srgbClr val="FFFFFF"/>
                 </a:solidFill>
               </a14:hiddenFill>
             </a:ext>
             <a:ext uri="{91240B29-F687-4f45-9708-019B960494DF}">
-              <a14:hiddenLine xmlns="" xmlns:a14="http://schemas.microsoft.com/office/drawing/2010/main" w="9525">
+              <a14:hiddenLine xmlns:a14="http://schemas.microsoft.com/office/drawing/2010/main" xmlns="" w="9525">
                 <a:solidFill>
                   <a:srgbClr val="000000"/>
                 </a:solidFill>
@@ -4270,14 +4270,14 @@
           <a:ln/>
           <a:extLst>
             <a:ext uri="{909E8E84-426E-40dd-AFC4-6F175D3DCCD1}">
-              <a14:hiddenFill xmlns="" xmlns:a14="http://schemas.microsoft.com/office/drawing/2010/main">
+              <a14:hiddenFill xmlns:a14="http://schemas.microsoft.com/office/drawing/2010/main" xmlns="">
                 <a:solidFill>
                   <a:srgbClr val="FFFFFF"/>
                 </a:solidFill>
               </a14:hiddenFill>
             </a:ext>
             <a:ext uri="{91240B29-F687-4f45-9708-019B960494DF}">
-              <a14:hiddenLine xmlns="" xmlns:a14="http://schemas.microsoft.com/office/drawing/2010/main" w="9525">
+              <a14:hiddenLine xmlns:a14="http://schemas.microsoft.com/office/drawing/2010/main" xmlns="" w="9525">
                 <a:solidFill>
                   <a:srgbClr val="000000"/>
                 </a:solidFill>
@@ -4464,7 +4464,7 @@
           </a:ln>
           <a:extLst>
             <a:ext uri="{909E8E84-426E-40dd-AFC4-6F175D3DCCD1}">
-              <a14:hiddenFill xmlns="" xmlns:a14="http://schemas.microsoft.com/office/drawing/2010/main">
+              <a14:hiddenFill xmlns:a14="http://schemas.microsoft.com/office/drawing/2010/main" xmlns="">
                 <a:solidFill>
                   <a:srgbClr val="FFFFFF"/>
                 </a:solidFill>
@@ -4488,14 +4488,14 @@
           <a:ln/>
           <a:extLst>
             <a:ext uri="{909E8E84-426E-40dd-AFC4-6F175D3DCCD1}">
-              <a14:hiddenFill xmlns="" xmlns:a14="http://schemas.microsoft.com/office/drawing/2010/main">
+              <a14:hiddenFill xmlns:a14="http://schemas.microsoft.com/office/drawing/2010/main" xmlns="">
                 <a:solidFill>
                   <a:srgbClr val="FFFFFF"/>
                 </a:solidFill>
               </a14:hiddenFill>
             </a:ext>
             <a:ext uri="{91240B29-F687-4f45-9708-019B960494DF}">
-              <a14:hiddenLine xmlns="" xmlns:a14="http://schemas.microsoft.com/office/drawing/2010/main" w="9525">
+              <a14:hiddenLine xmlns:a14="http://schemas.microsoft.com/office/drawing/2010/main" xmlns="" w="9525">
                 <a:solidFill>
                   <a:srgbClr val="000000"/>
                 </a:solidFill>
@@ -4611,14 +4611,14 @@
           <a:ln/>
           <a:extLst>
             <a:ext uri="{909E8E84-426E-40dd-AFC4-6F175D3DCCD1}">
-              <a14:hiddenFill xmlns="" xmlns:a14="http://schemas.microsoft.com/office/drawing/2010/main">
+              <a14:hiddenFill xmlns:a14="http://schemas.microsoft.com/office/drawing/2010/main" xmlns="">
                 <a:solidFill>
                   <a:srgbClr val="FFFFFF"/>
                 </a:solidFill>
               </a14:hiddenFill>
             </a:ext>
             <a:ext uri="{91240B29-F687-4f45-9708-019B960494DF}">
-              <a14:hiddenLine xmlns="" xmlns:a14="http://schemas.microsoft.com/office/drawing/2010/main" w="9525">
+              <a14:hiddenLine xmlns:a14="http://schemas.microsoft.com/office/drawing/2010/main" xmlns="" w="9525">
                 <a:solidFill>
                   <a:srgbClr val="000000"/>
                 </a:solidFill>
